--- a/Tutorial/OsarTutorial/12_Implementations/Common forms.pptx
+++ b/Tutorial/OsarTutorial/12_Implementations/Common forms.pptx
@@ -104,7 +104,217 @@
       </a:defRPr>
     </a:lvl9pPr>
   </p:defaultTextStyle>
+  <p:extLst>
+    <p:ext uri="{EFAFB233-063F-42B5-8137-9DF3F51BA10A}">
+      <p15:sldGuideLst xmlns:p15="http://schemas.microsoft.com/office/powerpoint/2012/main"/>
+    </p:ext>
+  </p:extLst>
 </p:presentation>
+</file>
+
+<file path=ppt/changesInfos/changesInfo1.xml><?xml version="1.0" encoding="utf-8"?>
+<pc:chgInfo xmlns:a="http://schemas.openxmlformats.org/drawingml/2006/main" xmlns:r="http://schemas.openxmlformats.org/officeDocument/2006/relationships" xmlns:ac="http://schemas.microsoft.com/office/drawing/2013/main/command" xmlns:pc="http://schemas.microsoft.com/office/powerpoint/2013/main/command">
+  <pc:docChgLst>
+    <pc:chgData name="Josh Reiss" userId="71f87c30-4769-4a42-a082-a6a82298c8cb" providerId="ADAL" clId="{A0C6B147-1166-4B44-A00D-F3D77F199F8E}"/>
+    <pc:docChg chg="undo custSel modSld">
+      <pc:chgData name="Josh Reiss" userId="71f87c30-4769-4a42-a082-a6a82298c8cb" providerId="ADAL" clId="{A0C6B147-1166-4B44-A00D-F3D77F199F8E}" dt="2026-03-03T13:37:09.413" v="42" actId="1038"/>
+      <pc:docMkLst>
+        <pc:docMk/>
+      </pc:docMkLst>
+      <pc:sldChg chg="modSp mod">
+        <pc:chgData name="Josh Reiss" userId="71f87c30-4769-4a42-a082-a6a82298c8cb" providerId="ADAL" clId="{A0C6B147-1166-4B44-A00D-F3D77F199F8E}" dt="2026-03-03T13:37:09.413" v="42" actId="1038"/>
+        <pc:sldMkLst>
+          <pc:docMk/>
+          <pc:sldMk cId="2335887921" sldId="357"/>
+        </pc:sldMkLst>
+        <pc:spChg chg="mod">
+          <ac:chgData name="Josh Reiss" userId="71f87c30-4769-4a42-a082-a6a82298c8cb" providerId="ADAL" clId="{A0C6B147-1166-4B44-A00D-F3D77F199F8E}" dt="2026-03-03T13:37:09.413" v="42" actId="1038"/>
+          <ac:spMkLst>
+            <pc:docMk/>
+            <pc:sldMk cId="2335887921" sldId="357"/>
+            <ac:spMk id="17" creationId="{80CDED6F-0323-4A4A-6CF0-E4DE52C309A1}"/>
+          </ac:spMkLst>
+        </pc:spChg>
+        <pc:spChg chg="mod">
+          <ac:chgData name="Josh Reiss" userId="71f87c30-4769-4a42-a082-a6a82298c8cb" providerId="ADAL" clId="{A0C6B147-1166-4B44-A00D-F3D77F199F8E}" dt="2026-03-03T13:35:34.160" v="30" actId="14100"/>
+          <ac:spMkLst>
+            <pc:docMk/>
+            <pc:sldMk cId="2335887921" sldId="357"/>
+            <ac:spMk id="19" creationId="{4E8AA5C8-F381-0E82-CDFC-D0858F532A66}"/>
+          </ac:spMkLst>
+        </pc:spChg>
+        <pc:spChg chg="mod">
+          <ac:chgData name="Josh Reiss" userId="71f87c30-4769-4a42-a082-a6a82298c8cb" providerId="ADAL" clId="{A0C6B147-1166-4B44-A00D-F3D77F199F8E}" dt="2026-03-03T13:35:41.683" v="34" actId="1037"/>
+          <ac:spMkLst>
+            <pc:docMk/>
+            <pc:sldMk cId="2335887921" sldId="357"/>
+            <ac:spMk id="25" creationId="{7EFB3D6B-3125-48FE-B9BD-0408AA546CA6}"/>
+          </ac:spMkLst>
+        </pc:spChg>
+        <pc:spChg chg="mod">
+          <ac:chgData name="Josh Reiss" userId="71f87c30-4769-4a42-a082-a6a82298c8cb" providerId="ADAL" clId="{A0C6B147-1166-4B44-A00D-F3D77F199F8E}" dt="2026-03-03T13:37:09.413" v="42" actId="1038"/>
+          <ac:spMkLst>
+            <pc:docMk/>
+            <pc:sldMk cId="2335887921" sldId="357"/>
+            <ac:spMk id="38" creationId="{2AEBD51B-A316-CC5F-B18C-A44A18E4F720}"/>
+          </ac:spMkLst>
+        </pc:spChg>
+        <pc:spChg chg="mod">
+          <ac:chgData name="Josh Reiss" userId="71f87c30-4769-4a42-a082-a6a82298c8cb" providerId="ADAL" clId="{A0C6B147-1166-4B44-A00D-F3D77F199F8E}" dt="2026-03-03T13:33:39.913" v="21" actId="20577"/>
+          <ac:spMkLst>
+            <pc:docMk/>
+            <pc:sldMk cId="2335887921" sldId="357"/>
+            <ac:spMk id="40" creationId="{06B026B5-C3F2-42FC-C8DF-71427316E04D}"/>
+          </ac:spMkLst>
+        </pc:spChg>
+        <pc:spChg chg="mod">
+          <ac:chgData name="Josh Reiss" userId="71f87c30-4769-4a42-a082-a6a82298c8cb" providerId="ADAL" clId="{A0C6B147-1166-4B44-A00D-F3D77F199F8E}" dt="2026-03-03T13:33:48.057" v="26" actId="1037"/>
+          <ac:spMkLst>
+            <pc:docMk/>
+            <pc:sldMk cId="2335887921" sldId="357"/>
+            <ac:spMk id="46" creationId="{0EC2F93C-764A-F4F9-26C0-493B5909588E}"/>
+          </ac:spMkLst>
+        </pc:spChg>
+        <pc:spChg chg="mod">
+          <ac:chgData name="Josh Reiss" userId="71f87c30-4769-4a42-a082-a6a82298c8cb" providerId="ADAL" clId="{A0C6B147-1166-4B44-A00D-F3D77F199F8E}" dt="2026-03-03T13:37:09.413" v="42" actId="1038"/>
+          <ac:spMkLst>
+            <pc:docMk/>
+            <pc:sldMk cId="2335887921" sldId="357"/>
+            <ac:spMk id="66" creationId="{235520DB-173B-5079-88C5-4334ED1EB0F6}"/>
+          </ac:spMkLst>
+        </pc:spChg>
+        <pc:spChg chg="mod">
+          <ac:chgData name="Josh Reiss" userId="71f87c30-4769-4a42-a082-a6a82298c8cb" providerId="ADAL" clId="{A0C6B147-1166-4B44-A00D-F3D77F199F8E}" dt="2026-03-03T13:32:46.823" v="1" actId="14100"/>
+          <ac:spMkLst>
+            <pc:docMk/>
+            <pc:sldMk cId="2335887921" sldId="357"/>
+            <ac:spMk id="68" creationId="{92B10E86-5C4B-74F9-75B6-6D7C271F09D2}"/>
+          </ac:spMkLst>
+        </pc:spChg>
+        <pc:spChg chg="mod">
+          <ac:chgData name="Josh Reiss" userId="71f87c30-4769-4a42-a082-a6a82298c8cb" providerId="ADAL" clId="{A0C6B147-1166-4B44-A00D-F3D77F199F8E}" dt="2026-03-03T13:32:57.069" v="4" actId="1037"/>
+          <ac:spMkLst>
+            <pc:docMk/>
+            <pc:sldMk cId="2335887921" sldId="357"/>
+            <ac:spMk id="74" creationId="{D42EBCB5-A160-3608-969D-2ACEA8BB228E}"/>
+          </ac:spMkLst>
+        </pc:spChg>
+        <pc:cxnChg chg="mod">
+          <ac:chgData name="Josh Reiss" userId="71f87c30-4769-4a42-a082-a6a82298c8cb" providerId="ADAL" clId="{A0C6B147-1166-4B44-A00D-F3D77F199F8E}" dt="2026-03-03T13:37:09.413" v="42" actId="1038"/>
+          <ac:cxnSpMkLst>
+            <pc:docMk/>
+            <pc:sldMk cId="2335887921" sldId="357"/>
+            <ac:cxnSpMk id="21" creationId="{21D492B1-28C9-2DB5-3AE7-5ADCC7534B2E}"/>
+          </ac:cxnSpMkLst>
+        </pc:cxnChg>
+        <pc:cxnChg chg="mod">
+          <ac:chgData name="Josh Reiss" userId="71f87c30-4769-4a42-a082-a6a82298c8cb" providerId="ADAL" clId="{A0C6B147-1166-4B44-A00D-F3D77F199F8E}" dt="2026-03-03T13:35:34.160" v="30" actId="14100"/>
+          <ac:cxnSpMkLst>
+            <pc:docMk/>
+            <pc:sldMk cId="2335887921" sldId="357"/>
+            <ac:cxnSpMk id="22" creationId="{37DFCA18-AD11-F1ED-08C0-6662680C9F83}"/>
+          </ac:cxnSpMkLst>
+        </pc:cxnChg>
+        <pc:cxnChg chg="mod">
+          <ac:chgData name="Josh Reiss" userId="71f87c30-4769-4a42-a082-a6a82298c8cb" providerId="ADAL" clId="{A0C6B147-1166-4B44-A00D-F3D77F199F8E}" dt="2026-03-03T13:35:41.683" v="34" actId="1037"/>
+          <ac:cxnSpMkLst>
+            <pc:docMk/>
+            <pc:sldMk cId="2335887921" sldId="357"/>
+            <ac:cxnSpMk id="24" creationId="{110BDEF2-E75D-DF60-BCA0-6B7659C67AB6}"/>
+          </ac:cxnSpMkLst>
+        </pc:cxnChg>
+        <pc:cxnChg chg="mod">
+          <ac:chgData name="Josh Reiss" userId="71f87c30-4769-4a42-a082-a6a82298c8cb" providerId="ADAL" clId="{A0C6B147-1166-4B44-A00D-F3D77F199F8E}" dt="2026-03-03T13:35:41.683" v="34" actId="1037"/>
+          <ac:cxnSpMkLst>
+            <pc:docMk/>
+            <pc:sldMk cId="2335887921" sldId="357"/>
+            <ac:cxnSpMk id="26" creationId="{C96CE486-DE5B-C3A3-23BB-5837C827F6E0}"/>
+          </ac:cxnSpMkLst>
+        </pc:cxnChg>
+        <pc:cxnChg chg="mod">
+          <ac:chgData name="Josh Reiss" userId="71f87c30-4769-4a42-a082-a6a82298c8cb" providerId="ADAL" clId="{A0C6B147-1166-4B44-A00D-F3D77F199F8E}" dt="2026-03-03T13:37:09.413" v="42" actId="1038"/>
+          <ac:cxnSpMkLst>
+            <pc:docMk/>
+            <pc:sldMk cId="2335887921" sldId="357"/>
+            <ac:cxnSpMk id="42" creationId="{71F5712F-D9F9-5585-3729-A655FFC6C9C0}"/>
+          </ac:cxnSpMkLst>
+        </pc:cxnChg>
+        <pc:cxnChg chg="mod">
+          <ac:chgData name="Josh Reiss" userId="71f87c30-4769-4a42-a082-a6a82298c8cb" providerId="ADAL" clId="{A0C6B147-1166-4B44-A00D-F3D77F199F8E}" dt="2026-03-03T13:33:35.101" v="20" actId="14100"/>
+          <ac:cxnSpMkLst>
+            <pc:docMk/>
+            <pc:sldMk cId="2335887921" sldId="357"/>
+            <ac:cxnSpMk id="43" creationId="{1F4F8EEB-4F73-E9E6-2BBE-B2CC19654D5F}"/>
+          </ac:cxnSpMkLst>
+        </pc:cxnChg>
+        <pc:cxnChg chg="mod">
+          <ac:chgData name="Josh Reiss" userId="71f87c30-4769-4a42-a082-a6a82298c8cb" providerId="ADAL" clId="{A0C6B147-1166-4B44-A00D-F3D77F199F8E}" dt="2026-03-03T13:33:48.057" v="26" actId="1037"/>
+          <ac:cxnSpMkLst>
+            <pc:docMk/>
+            <pc:sldMk cId="2335887921" sldId="357"/>
+            <ac:cxnSpMk id="45" creationId="{6CD5ED55-E425-0A99-D628-40ADB4386C09}"/>
+          </ac:cxnSpMkLst>
+        </pc:cxnChg>
+        <pc:cxnChg chg="mod">
+          <ac:chgData name="Josh Reiss" userId="71f87c30-4769-4a42-a082-a6a82298c8cb" providerId="ADAL" clId="{A0C6B147-1166-4B44-A00D-F3D77F199F8E}" dt="2026-03-03T13:33:48.057" v="26" actId="1037"/>
+          <ac:cxnSpMkLst>
+            <pc:docMk/>
+            <pc:sldMk cId="2335887921" sldId="357"/>
+            <ac:cxnSpMk id="47" creationId="{52385593-BA35-670D-AAD1-EF4B6EB95B29}"/>
+          </ac:cxnSpMkLst>
+        </pc:cxnChg>
+        <pc:cxnChg chg="mod">
+          <ac:chgData name="Josh Reiss" userId="71f87c30-4769-4a42-a082-a6a82298c8cb" providerId="ADAL" clId="{A0C6B147-1166-4B44-A00D-F3D77F199F8E}" dt="2026-03-03T13:33:54.668" v="27" actId="14100"/>
+          <ac:cxnSpMkLst>
+            <pc:docMk/>
+            <pc:sldMk cId="2335887921" sldId="357"/>
+            <ac:cxnSpMk id="48" creationId="{FC923CA7-B20F-81A0-AF48-ABBD189FB962}"/>
+          </ac:cxnSpMkLst>
+        </pc:cxnChg>
+        <pc:cxnChg chg="mod">
+          <ac:chgData name="Josh Reiss" userId="71f87c30-4769-4a42-a082-a6a82298c8cb" providerId="ADAL" clId="{A0C6B147-1166-4B44-A00D-F3D77F199F8E}" dt="2026-03-03T13:33:48.057" v="26" actId="1037"/>
+          <ac:cxnSpMkLst>
+            <pc:docMk/>
+            <pc:sldMk cId="2335887921" sldId="357"/>
+            <ac:cxnSpMk id="49" creationId="{B02ED99B-AAD2-09BE-0BE5-FE83276E1EF3}"/>
+          </ac:cxnSpMkLst>
+        </pc:cxnChg>
+        <pc:cxnChg chg="mod">
+          <ac:chgData name="Josh Reiss" userId="71f87c30-4769-4a42-a082-a6a82298c8cb" providerId="ADAL" clId="{A0C6B147-1166-4B44-A00D-F3D77F199F8E}" dt="2026-03-03T13:37:09.413" v="42" actId="1038"/>
+          <ac:cxnSpMkLst>
+            <pc:docMk/>
+            <pc:sldMk cId="2335887921" sldId="357"/>
+            <ac:cxnSpMk id="70" creationId="{B63FB155-A571-7D9C-7072-8CA2D8B0ADC7}"/>
+          </ac:cxnSpMkLst>
+        </pc:cxnChg>
+        <pc:cxnChg chg="mod">
+          <ac:chgData name="Josh Reiss" userId="71f87c30-4769-4a42-a082-a6a82298c8cb" providerId="ADAL" clId="{A0C6B147-1166-4B44-A00D-F3D77F199F8E}" dt="2026-03-03T13:32:46.823" v="1" actId="14100"/>
+          <ac:cxnSpMkLst>
+            <pc:docMk/>
+            <pc:sldMk cId="2335887921" sldId="357"/>
+            <ac:cxnSpMk id="71" creationId="{50044A71-9210-C9DC-82C2-156409E86D87}"/>
+          </ac:cxnSpMkLst>
+        </pc:cxnChg>
+        <pc:cxnChg chg="mod">
+          <ac:chgData name="Josh Reiss" userId="71f87c30-4769-4a42-a082-a6a82298c8cb" providerId="ADAL" clId="{A0C6B147-1166-4B44-A00D-F3D77F199F8E}" dt="2026-03-03T13:32:57.069" v="4" actId="1037"/>
+          <ac:cxnSpMkLst>
+            <pc:docMk/>
+            <pc:sldMk cId="2335887921" sldId="357"/>
+            <ac:cxnSpMk id="73" creationId="{5C505343-E446-899D-4444-66C85C9A52D0}"/>
+          </ac:cxnSpMkLst>
+        </pc:cxnChg>
+        <pc:cxnChg chg="mod">
+          <ac:chgData name="Josh Reiss" userId="71f87c30-4769-4a42-a082-a6a82298c8cb" providerId="ADAL" clId="{A0C6B147-1166-4B44-A00D-F3D77F199F8E}" dt="2026-03-03T13:32:57.069" v="4" actId="1037"/>
+          <ac:cxnSpMkLst>
+            <pc:docMk/>
+            <pc:sldMk cId="2335887921" sldId="357"/>
+            <ac:cxnSpMk id="75" creationId="{6019AC3D-8A8A-80A8-7C75-52DEC1170FED}"/>
+          </ac:cxnSpMkLst>
+        </pc:cxnChg>
+      </pc:sldChg>
+    </pc:docChg>
+  </pc:docChgLst>
+</pc:chgInfo>
 </file>
 
 <file path=ppt/slideLayouts/slideLayout1.xml><?xml version="1.0" encoding="utf-8"?>
@@ -254,7 +464,7 @@
           <a:p>
             <a:fld id="{4F3B3794-8F73-4636-A51C-45AB196F5AB7}" type="datetimeFigureOut">
               <a:rPr lang="en-GB" smtClean="0"/>
-              <a:t>29/08/2025</a:t>
+              <a:t>03/03/2026</a:t>
             </a:fld>
             <a:endParaRPr lang="en-GB"/>
           </a:p>
@@ -452,7 +662,7 @@
           <a:p>
             <a:fld id="{4F3B3794-8F73-4636-A51C-45AB196F5AB7}" type="datetimeFigureOut">
               <a:rPr lang="en-GB" smtClean="0"/>
-              <a:t>29/08/2025</a:t>
+              <a:t>03/03/2026</a:t>
             </a:fld>
             <a:endParaRPr lang="en-GB"/>
           </a:p>
@@ -660,7 +870,7 @@
           <a:p>
             <a:fld id="{4F3B3794-8F73-4636-A51C-45AB196F5AB7}" type="datetimeFigureOut">
               <a:rPr lang="en-GB" smtClean="0"/>
-              <a:t>29/08/2025</a:t>
+              <a:t>03/03/2026</a:t>
             </a:fld>
             <a:endParaRPr lang="en-GB"/>
           </a:p>
@@ -858,7 +1068,7 @@
           <a:p>
             <a:fld id="{4F3B3794-8F73-4636-A51C-45AB196F5AB7}" type="datetimeFigureOut">
               <a:rPr lang="en-GB" smtClean="0"/>
-              <a:t>29/08/2025</a:t>
+              <a:t>03/03/2026</a:t>
             </a:fld>
             <a:endParaRPr lang="en-GB"/>
           </a:p>
@@ -1133,7 +1343,7 @@
           <a:p>
             <a:fld id="{4F3B3794-8F73-4636-A51C-45AB196F5AB7}" type="datetimeFigureOut">
               <a:rPr lang="en-GB" smtClean="0"/>
-              <a:t>29/08/2025</a:t>
+              <a:t>03/03/2026</a:t>
             </a:fld>
             <a:endParaRPr lang="en-GB"/>
           </a:p>
@@ -1398,7 +1608,7 @@
           <a:p>
             <a:fld id="{4F3B3794-8F73-4636-A51C-45AB196F5AB7}" type="datetimeFigureOut">
               <a:rPr lang="en-GB" smtClean="0"/>
-              <a:t>29/08/2025</a:t>
+              <a:t>03/03/2026</a:t>
             </a:fld>
             <a:endParaRPr lang="en-GB"/>
           </a:p>
@@ -1810,7 +2020,7 @@
           <a:p>
             <a:fld id="{4F3B3794-8F73-4636-A51C-45AB196F5AB7}" type="datetimeFigureOut">
               <a:rPr lang="en-GB" smtClean="0"/>
-              <a:t>29/08/2025</a:t>
+              <a:t>03/03/2026</a:t>
             </a:fld>
             <a:endParaRPr lang="en-GB"/>
           </a:p>
@@ -1951,7 +2161,7 @@
           <a:p>
             <a:fld id="{4F3B3794-8F73-4636-A51C-45AB196F5AB7}" type="datetimeFigureOut">
               <a:rPr lang="en-GB" smtClean="0"/>
-              <a:t>29/08/2025</a:t>
+              <a:t>03/03/2026</a:t>
             </a:fld>
             <a:endParaRPr lang="en-GB"/>
           </a:p>
@@ -2064,7 +2274,7 @@
           <a:p>
             <a:fld id="{4F3B3794-8F73-4636-A51C-45AB196F5AB7}" type="datetimeFigureOut">
               <a:rPr lang="en-GB" smtClean="0"/>
-              <a:t>29/08/2025</a:t>
+              <a:t>03/03/2026</a:t>
             </a:fld>
             <a:endParaRPr lang="en-GB"/>
           </a:p>
@@ -2375,7 +2585,7 @@
           <a:p>
             <a:fld id="{4F3B3794-8F73-4636-A51C-45AB196F5AB7}" type="datetimeFigureOut">
               <a:rPr lang="en-GB" smtClean="0"/>
-              <a:t>29/08/2025</a:t>
+              <a:t>03/03/2026</a:t>
             </a:fld>
             <a:endParaRPr lang="en-GB"/>
           </a:p>
@@ -2663,7 +2873,7 @@
           <a:p>
             <a:fld id="{4F3B3794-8F73-4636-A51C-45AB196F5AB7}" type="datetimeFigureOut">
               <a:rPr lang="en-GB" smtClean="0"/>
-              <a:t>29/08/2025</a:t>
+              <a:t>03/03/2026</a:t>
             </a:fld>
             <a:endParaRPr lang="en-GB"/>
           </a:p>
@@ -2904,7 +3114,7 @@
           <a:p>
             <a:fld id="{4F3B3794-8F73-4636-A51C-45AB196F5AB7}" type="datetimeFigureOut">
               <a:rPr lang="en-GB" smtClean="0"/>
-              <a:t>29/08/2025</a:t>
+              <a:t>03/03/2026</a:t>
             </a:fld>
             <a:endParaRPr lang="en-GB"/>
           </a:p>
@@ -3375,8 +3585,8 @@
         </p:nvSpPr>
         <p:spPr>
           <a:xfrm>
-            <a:off x="7113317" y="3473189"/>
-            <a:ext cx="911467" cy="526062"/>
+            <a:off x="7040359" y="3473189"/>
+            <a:ext cx="1030146" cy="526062"/>
           </a:xfrm>
           <a:prstGeom prst="rect">
             <a:avLst/>
@@ -3479,8 +3689,8 @@
         </p:nvSpPr>
         <p:spPr>
           <a:xfrm>
-            <a:off x="8416902" y="2629772"/>
-            <a:ext cx="876770" cy="526062"/>
+            <a:off x="8297080" y="2629772"/>
+            <a:ext cx="996592" cy="526062"/>
           </a:xfrm>
           <a:prstGeom prst="rect">
             <a:avLst/>
@@ -3511,10 +3721,9 @@
           <a:p>
             <a:pPr algn="ctr"/>
             <a:r>
-              <a:rPr lang="en-GB" sz="1400" dirty="0" err="1"/>
-              <a:t>Feedbackgain</a:t>
-            </a:r>
-            <a:endParaRPr lang="en-GB" sz="1400" dirty="0"/>
+              <a:rPr lang="en-GB" sz="1400" dirty="0"/>
+              <a:t>Feedback gain</a:t>
+            </a:r>
           </a:p>
         </p:txBody>
       </p:sp>
@@ -3588,8 +3797,8 @@
         </p:nvCxnSpPr>
         <p:spPr>
           <a:xfrm>
-            <a:off x="8024784" y="3736220"/>
-            <a:ext cx="604124" cy="0"/>
+            <a:off x="8070505" y="3736220"/>
+            <a:ext cx="503539" cy="0"/>
           </a:xfrm>
           <a:prstGeom prst="straightConnector1">
             <a:avLst/>
@@ -3723,8 +3932,8 @@
         </p:nvCxnSpPr>
         <p:spPr>
           <a:xfrm flipH="1">
-            <a:off x="8848100" y="3155834"/>
-            <a:ext cx="7186" cy="361193"/>
+            <a:off x="8793237" y="3155834"/>
+            <a:ext cx="2139" cy="361193"/>
           </a:xfrm>
           <a:prstGeom prst="straightConnector1">
             <a:avLst/>
@@ -3765,7 +3974,7 @@
         </p:nvSpPr>
         <p:spPr>
           <a:xfrm>
-            <a:off x="8628908" y="3517027"/>
+            <a:off x="8574044" y="3517027"/>
             <a:ext cx="438385" cy="438385"/>
           </a:xfrm>
           <a:prstGeom prst="ellipse">
@@ -3826,8 +4035,8 @@
         </p:nvCxnSpPr>
         <p:spPr>
           <a:xfrm>
-            <a:off x="9067293" y="3736220"/>
-            <a:ext cx="595322" cy="0"/>
+            <a:off x="9012429" y="3736220"/>
+            <a:ext cx="650186" cy="0"/>
           </a:xfrm>
           <a:prstGeom prst="straightConnector1">
             <a:avLst/>
@@ -3914,8 +4123,8 @@
         </p:nvSpPr>
         <p:spPr>
           <a:xfrm>
-            <a:off x="7857771" y="5498928"/>
-            <a:ext cx="911467" cy="526062"/>
+            <a:off x="7800887" y="5498928"/>
+            <a:ext cx="1014071" cy="526062"/>
           </a:xfrm>
           <a:prstGeom prst="rect">
             <a:avLst/>
@@ -4018,8 +4227,8 @@
         </p:nvSpPr>
         <p:spPr>
           <a:xfrm>
-            <a:off x="9161356" y="4655511"/>
-            <a:ext cx="876770" cy="526062"/>
+            <a:off x="9049005" y="4655511"/>
+            <a:ext cx="989121" cy="526062"/>
           </a:xfrm>
           <a:prstGeom prst="rect">
             <a:avLst/>
@@ -4050,10 +4259,9 @@
           <a:p>
             <a:pPr algn="ctr"/>
             <a:r>
-              <a:rPr lang="en-GB" sz="1400" dirty="0" err="1"/>
-              <a:t>Feedbackgain</a:t>
-            </a:r>
-            <a:endParaRPr lang="en-GB" sz="1400" dirty="0"/>
+              <a:rPr lang="en-GB" sz="1400" dirty="0"/>
+              <a:t>Feedback gain</a:t>
+            </a:r>
           </a:p>
         </p:txBody>
       </p:sp>
@@ -4127,8 +4335,8 @@
         </p:nvCxnSpPr>
         <p:spPr>
           <a:xfrm>
-            <a:off x="8769238" y="5761959"/>
-            <a:ext cx="604124" cy="0"/>
+            <a:off x="8814958" y="5761959"/>
+            <a:ext cx="512684" cy="0"/>
           </a:xfrm>
           <a:prstGeom prst="straightConnector1">
             <a:avLst/>
@@ -4261,9 +4469,9 @@
           <p:nvPr/>
         </p:nvCxnSpPr>
         <p:spPr>
-          <a:xfrm flipH="1">
-            <a:off x="9592555" y="5181573"/>
-            <a:ext cx="7186" cy="361193"/>
+          <a:xfrm>
+            <a:off x="9543566" y="5181573"/>
+            <a:ext cx="3269" cy="361193"/>
           </a:xfrm>
           <a:prstGeom prst="straightConnector1">
             <a:avLst/>
@@ -4304,7 +4512,7 @@
         </p:nvSpPr>
         <p:spPr>
           <a:xfrm>
-            <a:off x="9373362" y="5542766"/>
+            <a:off x="9327642" y="5542766"/>
             <a:ext cx="438385" cy="438385"/>
           </a:xfrm>
           <a:prstGeom prst="ellipse">
@@ -4365,8 +4573,8 @@
         </p:nvCxnSpPr>
         <p:spPr>
           <a:xfrm>
-            <a:off x="9811747" y="5761959"/>
-            <a:ext cx="595322" cy="0"/>
+            <a:off x="9766027" y="5761959"/>
+            <a:ext cx="641042" cy="0"/>
           </a:xfrm>
           <a:prstGeom prst="straightConnector1">
             <a:avLst/>
@@ -4410,8 +4618,8 @@
         </p:nvCxnSpPr>
         <p:spPr>
           <a:xfrm>
-            <a:off x="9623621" y="6446698"/>
-            <a:ext cx="900651" cy="0"/>
+            <a:off x="9543566" y="6446698"/>
+            <a:ext cx="980705" cy="0"/>
           </a:xfrm>
           <a:prstGeom prst="straightConnector1">
             <a:avLst/>
@@ -4455,7 +4663,7 @@
         </p:nvCxnSpPr>
         <p:spPr>
           <a:xfrm>
-            <a:off x="9592555" y="5981151"/>
+            <a:off x="9546835" y="5981151"/>
             <a:ext cx="7186" cy="465547"/>
           </a:xfrm>
           <a:prstGeom prst="straightConnector1">
@@ -4497,8 +4705,8 @@
         </p:nvSpPr>
         <p:spPr>
           <a:xfrm>
-            <a:off x="7006426" y="1428752"/>
-            <a:ext cx="911467" cy="526062"/>
+            <a:off x="6933468" y="1428752"/>
+            <a:ext cx="1030146" cy="526062"/>
           </a:xfrm>
           <a:prstGeom prst="rect">
             <a:avLst/>
@@ -4601,8 +4809,8 @@
         </p:nvSpPr>
         <p:spPr>
           <a:xfrm>
-            <a:off x="8310011" y="585335"/>
-            <a:ext cx="876770" cy="526062"/>
+            <a:off x="8229600" y="585335"/>
+            <a:ext cx="957181" cy="526062"/>
           </a:xfrm>
           <a:prstGeom prst="rect">
             <a:avLst/>
@@ -4633,10 +4841,9 @@
           <a:p>
             <a:pPr algn="ctr"/>
             <a:r>
-              <a:rPr lang="en-GB" sz="1400" dirty="0" err="1"/>
-              <a:t>Feedbackgain</a:t>
-            </a:r>
-            <a:endParaRPr lang="en-GB" sz="1400" dirty="0"/>
+              <a:rPr lang="en-GB" sz="1400" dirty="0"/>
+              <a:t>Feedback gain</a:t>
+            </a:r>
           </a:p>
         </p:txBody>
       </p:sp>
@@ -4710,8 +4917,8 @@
         </p:nvCxnSpPr>
         <p:spPr>
           <a:xfrm>
-            <a:off x="7917893" y="1691783"/>
-            <a:ext cx="604124" cy="0"/>
+            <a:off x="7963614" y="1691783"/>
+            <a:ext cx="530971" cy="0"/>
           </a:xfrm>
           <a:prstGeom prst="straightConnector1">
             <a:avLst/>
@@ -4847,9 +5054,9 @@
           <p:nvPr/>
         </p:nvCxnSpPr>
         <p:spPr>
-          <a:xfrm flipH="1">
-            <a:off x="8741209" y="1111397"/>
-            <a:ext cx="7186" cy="361193"/>
+          <a:xfrm>
+            <a:off x="8708191" y="1111397"/>
+            <a:ext cx="5587" cy="361193"/>
           </a:xfrm>
           <a:prstGeom prst="straightConnector1">
             <a:avLst/>
@@ -4890,7 +5097,7 @@
         </p:nvSpPr>
         <p:spPr>
           <a:xfrm>
-            <a:off x="8522017" y="1472590"/>
+            <a:off x="8494585" y="1472590"/>
             <a:ext cx="438385" cy="438385"/>
           </a:xfrm>
           <a:prstGeom prst="ellipse">
@@ -4951,8 +5158,8 @@
         </p:nvCxnSpPr>
         <p:spPr>
           <a:xfrm>
-            <a:off x="8960402" y="1691783"/>
-            <a:ext cx="595322" cy="0"/>
+            <a:off x="8932970" y="1691783"/>
+            <a:ext cx="622754" cy="0"/>
           </a:xfrm>
           <a:prstGeom prst="straightConnector1">
             <a:avLst/>
